--- a/catalog/samples/timeline_matrix.pptx
+++ b/catalog/samples/timeline_matrix.pptx
@@ -1472,7 +1472,7 @@
           </a:p>
           <a:p>
             <a:r>
-              <a:t>  "template_sha256": "30e7706886456e2f9936db234bf6c042a0e7f0127ee2763dbaeaac847e4dbbe1"</a:t>
+              <a:t>  "template_sha256": "2613d2e61b45d095b0d5f08eacefd088c7dec1c9225ead30b4d4a9ca506cb7c9"</a:t>
             </a:r>
           </a:p>
           <a:p>
